--- a/电力行业四巨头_中特估分析报告.pptx
+++ b/电力行业四巨头_中特估分析报告.pptx
@@ -4334,7 +4334,7 @@
               </a:defRPr>
             </a:pPr>
             <a:r>
-              <a:t>2.0%</a:t>
+              <a:t>18.8%</a:t>
             </a:r>
           </a:p>
           <a:p>
@@ -4421,7 +4421,7 @@
               </a:defRPr>
             </a:pPr>
             <a:r>
-              <a:t>0.60</a:t>
+              <a:t>0.30</a:t>
             </a:r>
           </a:p>
           <a:p>
@@ -5788,7 +5788,7 @@
               </a:defRPr>
             </a:pPr>
             <a:r>
-              <a:t>✓ 暂无明显优势</a:t>
+              <a:t>✓ 毛利率高，定价能力强</a:t>
             </a:r>
           </a:p>
           <a:p>
@@ -5803,7 +5803,37 @@
               </a:defRPr>
             </a:pPr>
             <a:r>
-              <a:t>✗ 净利率较低</a:t>
+              <a:t>✓ 净利率优秀</a:t>
+            </a:r>
+          </a:p>
+          <a:p>
+            <a:pPr>
+              <a:spcAft>
+                <a:spcPts val="800"/>
+              </a:spcAft>
+              <a:defRPr sz="1300">
+                <a:solidFill>
+                  <a:srgbClr val="333333"/>
+                </a:solidFill>
+              </a:defRPr>
+            </a:pPr>
+            <a:r>
+              <a:t>✗ 资产周转效率低</a:t>
+            </a:r>
+          </a:p>
+          <a:p>
+            <a:pPr>
+              <a:spcAft>
+                <a:spcPts val="800"/>
+              </a:spcAft>
+              <a:defRPr sz="1300">
+                <a:solidFill>
+                  <a:srgbClr val="333333"/>
+                </a:solidFill>
+              </a:defRPr>
+            </a:pPr>
+            <a:r>
+              <a:t>→ 建议优化资产配置提升周转效率</a:t>
             </a:r>
           </a:p>
           <a:p>
@@ -6140,7 +6170,7 @@
               </a:defRPr>
             </a:pPr>
             <a:r>
-              <a:t>5.0%</a:t>
+              <a:t>19.9%</a:t>
             </a:r>
           </a:p>
           <a:p>
@@ -6227,7 +6257,7 @@
               </a:defRPr>
             </a:pPr>
             <a:r>
-              <a:t>0.60</a:t>
+              <a:t>0.45</a:t>
             </a:r>
           </a:p>
           <a:p>
@@ -7594,7 +7624,7 @@
               </a:defRPr>
             </a:pPr>
             <a:r>
-              <a:t>✓ 暂无明显优势</a:t>
+              <a:t>✓ 毛利率高，定价能力强</a:t>
             </a:r>
           </a:p>
           <a:p>
@@ -7609,7 +7639,37 @@
               </a:defRPr>
             </a:pPr>
             <a:r>
-              <a:t>✗ 暂无明显劣势</a:t>
+              <a:t>✓ 净利率优秀</a:t>
+            </a:r>
+          </a:p>
+          <a:p>
+            <a:pPr>
+              <a:spcAft>
+                <a:spcPts val="800"/>
+              </a:spcAft>
+              <a:defRPr sz="1300">
+                <a:solidFill>
+                  <a:srgbClr val="333333"/>
+                </a:solidFill>
+              </a:defRPr>
+            </a:pPr>
+            <a:r>
+              <a:t>✗ 资产周转效率低</a:t>
+            </a:r>
+          </a:p>
+          <a:p>
+            <a:pPr>
+              <a:spcAft>
+                <a:spcPts val="800"/>
+              </a:spcAft>
+              <a:defRPr sz="1300">
+                <a:solidFill>
+                  <a:srgbClr val="333333"/>
+                </a:solidFill>
+              </a:defRPr>
+            </a:pPr>
+            <a:r>
+              <a:t>→ 建议优化资产配置提升周转效率</a:t>
             </a:r>
           </a:p>
           <a:p>
@@ -7946,7 +8006,7 @@
               </a:defRPr>
             </a:pPr>
             <a:r>
-              <a:t>3.2%</a:t>
+              <a:t>21.6%</a:t>
             </a:r>
           </a:p>
           <a:p>
@@ -8033,7 +8093,7 @@
               </a:defRPr>
             </a:pPr>
             <a:r>
-              <a:t>0.60</a:t>
+              <a:t>0.25</a:t>
             </a:r>
           </a:p>
           <a:p>
@@ -9400,7 +9460,7 @@
               </a:defRPr>
             </a:pPr>
             <a:r>
-              <a:t>✓ 暂无明显优势</a:t>
+              <a:t>✓ 毛利率高，定价能力强</a:t>
             </a:r>
           </a:p>
           <a:p>
@@ -9415,7 +9475,37 @@
               </a:defRPr>
             </a:pPr>
             <a:r>
-              <a:t>✗ 净利率较低</a:t>
+              <a:t>✓ 净利率优秀</a:t>
+            </a:r>
+          </a:p>
+          <a:p>
+            <a:pPr>
+              <a:spcAft>
+                <a:spcPts val="800"/>
+              </a:spcAft>
+              <a:defRPr sz="1300">
+                <a:solidFill>
+                  <a:srgbClr val="333333"/>
+                </a:solidFill>
+              </a:defRPr>
+            </a:pPr>
+            <a:r>
+              <a:t>✗ 资产周转效率低</a:t>
+            </a:r>
+          </a:p>
+          <a:p>
+            <a:pPr>
+              <a:spcAft>
+                <a:spcPts val="800"/>
+              </a:spcAft>
+              <a:defRPr sz="1300">
+                <a:solidFill>
+                  <a:srgbClr val="333333"/>
+                </a:solidFill>
+              </a:defRPr>
+            </a:pPr>
+            <a:r>
+              <a:t>→ 建议优化资产配置提升周转效率</a:t>
             </a:r>
           </a:p>
           <a:p>
@@ -9752,7 +9842,7 @@
               </a:defRPr>
             </a:pPr>
             <a:r>
-              <a:t>2.7%</a:t>
+              <a:t>68.6%</a:t>
             </a:r>
           </a:p>
           <a:p>
@@ -9839,7 +9929,7 @@
               </a:defRPr>
             </a:pPr>
             <a:r>
-              <a:t>0.60</a:t>
+              <a:t>0.15</a:t>
             </a:r>
           </a:p>
           <a:p>
@@ -11206,7 +11296,7 @@
               </a:defRPr>
             </a:pPr>
             <a:r>
-              <a:t>✓ 暂无明显优势</a:t>
+              <a:t>✓ 毛利率高，定价能力强</a:t>
             </a:r>
           </a:p>
           <a:p>
@@ -11221,7 +11311,7 @@
               </a:defRPr>
             </a:pPr>
             <a:r>
-              <a:t>✗ 净利率较低</a:t>
+              <a:t>✓ 净利率优秀</a:t>
             </a:r>
           </a:p>
           <a:p>
@@ -11236,7 +11326,37 @@
               </a:defRPr>
             </a:pPr>
             <a:r>
-              <a:t>→ 关注电价政策和清洁能源转型</a:t>
+              <a:t>✓ 财务结构稳健</a:t>
+            </a:r>
+          </a:p>
+          <a:p>
+            <a:pPr>
+              <a:spcAft>
+                <a:spcPts val="800"/>
+              </a:spcAft>
+              <a:defRPr sz="1300">
+                <a:solidFill>
+                  <a:srgbClr val="333333"/>
+                </a:solidFill>
+              </a:defRPr>
+            </a:pPr>
+            <a:r>
+              <a:t>✗ 资产周转效率低</a:t>
+            </a:r>
+          </a:p>
+          <a:p>
+            <a:pPr>
+              <a:spcAft>
+                <a:spcPts val="800"/>
+              </a:spcAft>
+              <a:defRPr sz="1300">
+                <a:solidFill>
+                  <a:srgbClr val="333333"/>
+                </a:solidFill>
+              </a:defRPr>
+            </a:pPr>
+            <a:r>
+              <a:t>→ 建议优化资产配置提升周转效率</a:t>
             </a:r>
           </a:p>
         </p:txBody>
